--- a/weekly_presentations/week02_microstructure.pptx
+++ b/weekly_presentations/week02_microstructure.pptx
@@ -11,6 +11,8 @@
     <p:sldId id="259" r:id="rId10"/>
     <p:sldId id="260" r:id="rId11"/>
     <p:sldId id="261" r:id="rId12"/>
+    <p:sldId id="262" r:id="rId13"/>
+    <p:sldId id="263" r:id="rId14"/>
   </p:sldIdLst>
   <p:sldSz cx="12191695" cy="6858000" type="screen4x3"/>
   <p:notesSz cx="6858000" cy="9144000"/>
@@ -3183,7 +3185,7 @@
           <a:lstStyle/>
           <a:p>
             <a:r>
-              <a:rPr sz="3200" b="1" i="0">
+              <a:rPr sz="3000" b="1" i="0">
                 <a:solidFill>
                   <a:srgbClr val="990000"/>
                 </a:solidFill>
@@ -3194,13 +3196,13 @@
           </a:p>
           <a:p>
             <a:r>
-              <a:rPr sz="1900" b="0" i="1">
+              <a:rPr sz="1800" b="0" i="1">
                 <a:solidFill>
                   <a:srgbClr val="6D6D6D"/>
                 </a:solidFill>
                 <a:latin typeface="Arial"/>
               </a:rPr>
-              <a:t>From limit order books to the role of the market maker</a:t>
+              <a:t>From the limit order book to the role of the market maker</a:t>
             </a:r>
           </a:p>
         </p:txBody>
@@ -3236,49 +3238,6 @@
               </a:rPr>
               <a:t>Optimal Market Making for Cryptocurrency Options  ·  NC State University</a:t>
             </a:r>
-          </a:p>
-        </p:txBody>
-      </p:sp>
-      <p:sp>
-        <p:nvSpPr>
-          <p:cNvPr id="6" name="Rectangle 5"/>
-          <p:cNvSpPr/>
-          <p:nvPr/>
-        </p:nvSpPr>
-        <p:spPr>
-          <a:xfrm>
-            <a:off x="548640" y="5394960"/>
-            <a:ext cx="3657600" cy="38100"/>
-          </a:xfrm>
-          <a:prstGeom prst="rect">
-            <a:avLst/>
-          </a:prstGeom>
-          <a:solidFill>
-            <a:srgbClr val="CC0000"/>
-          </a:solidFill>
-          <a:ln>
-            <a:noFill/>
-          </a:ln>
-        </p:spPr>
-        <p:style>
-          <a:lnRef idx="1">
-            <a:schemeClr val="accent1"/>
-          </a:lnRef>
-          <a:fillRef idx="3">
-            <a:schemeClr val="accent1"/>
-          </a:fillRef>
-          <a:effectRef idx="2">
-            <a:schemeClr val="accent1"/>
-          </a:effectRef>
-          <a:fontRef idx="minor">
-            <a:schemeClr val="lt1"/>
-          </a:fontRef>
-        </p:style>
-        <p:txBody>
-          <a:bodyPr rtlCol="0" anchor="ctr"/>
-          <a:lstStyle/>
-          <a:p>
-            <a:pPr algn="ctr"/>
           </a:p>
         </p:txBody>
       </p:sp>
@@ -3341,13 +3300,13 @@
           <a:noFill/>
         </p:spPr>
         <p:txBody>
-          <a:bodyPr wrap="none">
+          <a:bodyPr wrap="square">
             <a:spAutoFit/>
           </a:bodyPr>
           <a:lstStyle/>
           <a:p>
             <a:r>
-              <a:rPr sz="2600" b="1" i="0">
+              <a:rPr sz="2400" b="1" i="0">
                 <a:solidFill>
                   <a:srgbClr val="990000"/>
                 </a:solidFill>
@@ -3366,8 +3325,8 @@
         </p:nvSpPr>
         <p:spPr>
           <a:xfrm>
-            <a:off x="457200" y="1234440"/>
-            <a:ext cx="11247120" cy="31750"/>
+            <a:off x="457200" y="1371600"/>
+            <a:ext cx="11247120" cy="27940"/>
           </a:xfrm>
           <a:prstGeom prst="rect">
             <a:avLst/>
@@ -3409,7 +3368,7 @@
         </p:nvSpPr>
         <p:spPr>
           <a:xfrm>
-            <a:off x="640080" y="1554480"/>
+            <a:off x="640080" y="1600200"/>
             <a:ext cx="10972800" cy="4937760"/>
           </a:xfrm>
           <a:prstGeom prst="rect">
@@ -3425,43 +3384,43 @@
           <a:p>
             <a:pPr>
               <a:spcAft>
-                <a:spcPts val="1000"/>
+                <a:spcPts val="800"/>
               </a:spcAft>
             </a:pPr>
             <a:r>
-              <a:rPr sz="1900" b="0" i="0">
+              <a:rPr sz="1700" b="0" i="0">
                 <a:solidFill>
                   <a:srgbClr val="1A1A1A"/>
                 </a:solidFill>
                 <a:latin typeface="Arial"/>
               </a:rPr>
-              <a:t>•  Reconstruct a limit order book from raw exchange events</a:t>
+              <a:t>•  Reconstruct an L2 order book from Coincall data</a:t>
             </a:r>
           </a:p>
           <a:p>
             <a:pPr>
               <a:spcAft>
-                <a:spcPts val="1000"/>
+                <a:spcPts val="800"/>
               </a:spcAft>
             </a:pPr>
             <a:r>
-              <a:rPr sz="1900" b="0" i="0">
+              <a:rPr sz="1700" b="0" i="0">
                 <a:solidFill>
                   <a:srgbClr val="1A1A1A"/>
                 </a:solidFill>
                 <a:latin typeface="Arial"/>
               </a:rPr>
-              <a:t>•  Decompose the bid-ask spread into its three classical components</a:t>
+              <a:t>•  Decompose the bid-ask spread (Roll, Glosten-Milgrom, Kyle)</a:t>
             </a:r>
           </a:p>
           <a:p>
             <a:pPr>
               <a:spcAft>
-                <a:spcPts val="1000"/>
+                <a:spcPts val="800"/>
               </a:spcAft>
             </a:pPr>
             <a:r>
-              <a:rPr sz="1900" b="0" i="0">
+              <a:rPr sz="1700" b="0" i="0">
                 <a:solidFill>
                   <a:srgbClr val="1A1A1A"/>
                 </a:solidFill>
@@ -3531,13 +3490,13 @@
           <a:noFill/>
         </p:spPr>
         <p:txBody>
-          <a:bodyPr wrap="none">
+          <a:bodyPr wrap="square">
             <a:spAutoFit/>
           </a:bodyPr>
           <a:lstStyle/>
           <a:p>
             <a:r>
-              <a:rPr sz="2600" b="1" i="0">
+              <a:rPr sz="2400" b="1" i="0">
                 <a:solidFill>
                   <a:srgbClr val="990000"/>
                 </a:solidFill>
@@ -3556,8 +3515,8 @@
         </p:nvSpPr>
         <p:spPr>
           <a:xfrm>
-            <a:off x="457200" y="1234440"/>
-            <a:ext cx="11247120" cy="31750"/>
+            <a:off x="457200" y="1371600"/>
+            <a:ext cx="11247120" cy="27940"/>
           </a:xfrm>
           <a:prstGeom prst="rect">
             <a:avLst/>
@@ -3599,7 +3558,7 @@
         </p:nvSpPr>
         <p:spPr>
           <a:xfrm>
-            <a:off x="640080" y="1554480"/>
+            <a:off x="640080" y="1600200"/>
             <a:ext cx="10972800" cy="4937760"/>
           </a:xfrm>
           <a:prstGeom prst="rect">
@@ -3615,11 +3574,11 @@
           <a:p>
             <a:pPr>
               <a:spcAft>
-                <a:spcPts val="1000"/>
+                <a:spcPts val="800"/>
               </a:spcAft>
             </a:pPr>
             <a:r>
-              <a:rPr sz="1900" b="0" i="0">
+              <a:rPr sz="1700" b="0" i="0">
                 <a:solidFill>
                   <a:srgbClr val="1A1A1A"/>
                 </a:solidFill>
@@ -3631,11 +3590,11 @@
           <a:p>
             <a:pPr>
               <a:spcAft>
-                <a:spcPts val="1000"/>
+                <a:spcPts val="800"/>
               </a:spcAft>
             </a:pPr>
             <a:r>
-              <a:rPr sz="1900" b="0" i="0">
+              <a:rPr sz="1700" b="0" i="0">
                 <a:solidFill>
                   <a:srgbClr val="1A1A1A"/>
                 </a:solidFill>
@@ -3647,33 +3606,33 @@
           <a:p>
             <a:pPr>
               <a:spcAft>
-                <a:spcPts val="1000"/>
+                <a:spcPts val="800"/>
               </a:spcAft>
             </a:pPr>
             <a:r>
-              <a:rPr sz="1900" b="0" i="0">
+              <a:rPr sz="1700" b="0" i="0">
                 <a:solidFill>
                   <a:srgbClr val="1A1A1A"/>
                 </a:solidFill>
                 <a:latin typeface="Arial"/>
               </a:rPr>
-              <a:t>•  L1 and L2 views (Coincall provides L2; there is no L3 feed); tick and lot size</a:t>
+              <a:t>•  L1 and L2 views (Coincall provides L2; there is no L3 / per-order feed)</a:t>
             </a:r>
           </a:p>
           <a:p>
             <a:pPr>
               <a:spcAft>
-                <a:spcPts val="1000"/>
+                <a:spcPts val="800"/>
               </a:spcAft>
             </a:pPr>
             <a:r>
-              <a:rPr sz="1900" b="0" i="0">
+              <a:rPr sz="1700" b="0" i="0">
                 <a:solidFill>
                   <a:srgbClr val="1A1A1A"/>
                 </a:solidFill>
                 <a:latin typeface="Arial"/>
               </a:rPr>
-              <a:t>•  Coincall architecture: contracts, fees, market-maker tiers</a:t>
+              <a:t>•  Because data is L2, we model aggregate intensity, not queue position</a:t>
             </a:r>
           </a:p>
         </p:txBody>
@@ -3737,13 +3696,13 @@
           <a:noFill/>
         </p:spPr>
         <p:txBody>
-          <a:bodyPr wrap="none">
+          <a:bodyPr wrap="square">
             <a:spAutoFit/>
           </a:bodyPr>
           <a:lstStyle/>
           <a:p>
             <a:r>
-              <a:rPr sz="2600" b="1" i="0">
+              <a:rPr sz="2400" b="1" i="0">
                 <a:solidFill>
                   <a:srgbClr val="990000"/>
                 </a:solidFill>
@@ -3762,8 +3721,8 @@
         </p:nvSpPr>
         <p:spPr>
           <a:xfrm>
-            <a:off x="457200" y="1234440"/>
-            <a:ext cx="11247120" cy="31750"/>
+            <a:off x="457200" y="1371600"/>
+            <a:ext cx="11247120" cy="27940"/>
           </a:xfrm>
           <a:prstGeom prst="rect">
             <a:avLst/>
@@ -3805,7 +3764,7 @@
         </p:nvSpPr>
         <p:spPr>
           <a:xfrm>
-            <a:off x="640080" y="1554480"/>
+            <a:off x="640080" y="1600200"/>
             <a:ext cx="10972800" cy="4937760"/>
           </a:xfrm>
           <a:prstGeom prst="rect">
@@ -3821,27 +3780,27 @@
           <a:p>
             <a:pPr>
               <a:spcAft>
-                <a:spcPts val="1000"/>
+                <a:spcPts val="800"/>
               </a:spcAft>
             </a:pPr>
             <a:r>
-              <a:rPr sz="1900" b="0" i="0">
+              <a:rPr sz="1700" b="0" i="0">
                 <a:solidFill>
                   <a:srgbClr val="1A1A1A"/>
                 </a:solidFill>
                 <a:latin typeface="Arial"/>
               </a:rPr>
-              <a:t>•  Adverse selection, inventory, and order-processing costs</a:t>
+              <a:t>•  Adverse selection + inventory + order-processing costs</a:t>
             </a:r>
           </a:p>
           <a:p>
             <a:pPr>
               <a:spcAft>
-                <a:spcPts val="1000"/>
+                <a:spcPts val="800"/>
               </a:spcAft>
             </a:pPr>
             <a:r>
-              <a:rPr sz="1900" b="0" i="0">
+              <a:rPr sz="1700" b="0" i="0">
                 <a:solidFill>
                   <a:srgbClr val="1A1A1A"/>
                 </a:solidFill>
@@ -3853,43 +3812,27 @@
           <a:p>
             <a:pPr>
               <a:spcAft>
-                <a:spcPts val="1000"/>
+                <a:spcPts val="800"/>
               </a:spcAft>
             </a:pPr>
             <a:r>
-              <a:rPr sz="1900" b="0" i="0">
+              <a:rPr sz="1700" b="0" i="0">
                 <a:solidFill>
                   <a:srgbClr val="1A1A1A"/>
                 </a:solidFill>
                 <a:latin typeface="Arial"/>
               </a:rPr>
-              <a:t>•  Glosten-Milgrom (1985): asymmetric information</a:t>
+              <a:t>•  Glosten-Milgrom (1985): asymmetric information sets the spread</a:t>
             </a:r>
           </a:p>
           <a:p>
             <a:pPr>
               <a:spcAft>
-                <a:spcPts val="1000"/>
+                <a:spcPts val="800"/>
               </a:spcAft>
             </a:pPr>
             <a:r>
-              <a:rPr sz="1900" b="0" i="0">
-                <a:solidFill>
-                  <a:srgbClr val="1A1A1A"/>
-                </a:solidFill>
-                <a:latin typeface="Arial"/>
-              </a:rPr>
-              <a:t>•  Kyle (1985): the strategic informed trader</a:t>
-            </a:r>
-          </a:p>
-          <a:p>
-            <a:pPr>
-              <a:spcAft>
-                <a:spcPts val="1000"/>
-              </a:spcAft>
-            </a:pPr>
-            <a:r>
-              <a:rPr sz="1900" b="0" i="0">
+              <a:rPr sz="1700" b="0" i="0">
                 <a:solidFill>
                   <a:srgbClr val="1A1A1A"/>
                 </a:solidFill>
@@ -3934,7 +3877,7 @@
         </p:blipFill>
         <p:spPr>
           <a:xfrm>
-            <a:off x="9784080" y="274320"/>
+            <a:off x="9784080" y="228600"/>
             <a:ext cx="2011680" cy="316653"/>
           </a:xfrm>
           <a:prstGeom prst="rect">
@@ -3950,8 +3893,8 @@
         </p:nvSpPr>
         <p:spPr>
           <a:xfrm>
-            <a:off x="457200" y="457200"/>
-            <a:ext cx="8961120" cy="822960"/>
+            <a:off x="457200" y="411480"/>
+            <a:ext cx="8961120" cy="731520"/>
           </a:xfrm>
           <a:prstGeom prst="rect">
             <a:avLst/>
@@ -3965,147 +3908,41 @@
           <a:lstStyle/>
           <a:p>
             <a:r>
-              <a:rPr sz="2600" b="1" i="0">
+              <a:rPr sz="2200" b="1" i="0">
                 <a:solidFill>
                   <a:srgbClr val="990000"/>
                 </a:solidFill>
                 <a:latin typeface="Arial"/>
               </a:rPr>
-              <a:t>Recitation</a:t>
-            </a:r>
-          </a:p>
-        </p:txBody>
-      </p:sp>
-      <p:sp>
-        <p:nvSpPr>
-          <p:cNvPr id="4" name="Rectangle 3"/>
-          <p:cNvSpPr/>
+              <a:t>Illustration</a:t>
+            </a:r>
+          </a:p>
+        </p:txBody>
+      </p:sp>
+      <p:pic>
+        <p:nvPicPr>
+          <p:cNvPr id="4" name="Picture 3" descr="week02.png"/>
+          <p:cNvPicPr>
+            <a:picLocks noChangeAspect="1"/>
+          </p:cNvPicPr>
           <p:nvPr/>
-        </p:nvSpPr>
-        <p:spPr>
-          <a:xfrm>
-            <a:off x="457200" y="1234440"/>
-            <a:ext cx="11247120" cy="31750"/>
+        </p:nvPicPr>
+        <p:blipFill>
+          <a:blip r:embed="rId3"/>
+          <a:stretch>
+            <a:fillRect/>
+          </a:stretch>
+        </p:blipFill>
+        <p:spPr>
+          <a:xfrm>
+            <a:off x="1280160" y="1371600"/>
+            <a:ext cx="9601200" cy="5232400"/>
           </a:xfrm>
           <a:prstGeom prst="rect">
             <a:avLst/>
           </a:prstGeom>
-          <a:solidFill>
-            <a:srgbClr val="CC0000"/>
-          </a:solidFill>
-          <a:ln>
-            <a:noFill/>
-          </a:ln>
-        </p:spPr>
-        <p:style>
-          <a:lnRef idx="1">
-            <a:schemeClr val="accent1"/>
-          </a:lnRef>
-          <a:fillRef idx="3">
-            <a:schemeClr val="accent1"/>
-          </a:fillRef>
-          <a:effectRef idx="2">
-            <a:schemeClr val="accent1"/>
-          </a:effectRef>
-          <a:fontRef idx="minor">
-            <a:schemeClr val="lt1"/>
-          </a:fontRef>
-        </p:style>
-        <p:txBody>
-          <a:bodyPr rtlCol="0" anchor="ctr"/>
-          <a:lstStyle/>
-          <a:p>
-            <a:pPr algn="ctr"/>
-          </a:p>
-        </p:txBody>
-      </p:sp>
-      <p:sp>
-        <p:nvSpPr>
-          <p:cNvPr id="5" name="TextBox 4"/>
-          <p:cNvSpPr txBox="1"/>
-          <p:nvPr/>
-        </p:nvSpPr>
-        <p:spPr>
-          <a:xfrm>
-            <a:off x="640080" y="1554480"/>
-            <a:ext cx="10972800" cy="4937760"/>
-          </a:xfrm>
-          <a:prstGeom prst="rect">
-            <a:avLst/>
-          </a:prstGeom>
-          <a:noFill/>
-        </p:spPr>
-        <p:txBody>
-          <a:bodyPr wrap="square">
-            <a:spAutoFit/>
-          </a:bodyPr>
-          <a:lstStyle/>
-          <a:p>
-            <a:pPr>
-              <a:spcAft>
-                <a:spcPts val="1000"/>
-              </a:spcAft>
-            </a:pPr>
-            <a:r>
-              <a:rPr sz="1900" b="0" i="0">
-                <a:solidFill>
-                  <a:srgbClr val="1A1A1A"/>
-                </a:solidFill>
-                <a:latin typeface="Arial"/>
-              </a:rPr>
-              <a:t>•  Build an L2 order-book reconstructor in Python</a:t>
-            </a:r>
-          </a:p>
-          <a:p>
-            <a:pPr>
-              <a:spcAft>
-                <a:spcPts val="1000"/>
-              </a:spcAft>
-            </a:pPr>
-            <a:r>
-              <a:rPr sz="1900" b="0" i="0">
-                <a:solidFill>
-                  <a:srgbClr val="1A1A1A"/>
-                </a:solidFill>
-                <a:latin typeface="Arial"/>
-              </a:rPr>
-              <a:t>•  Replay one hour of Coincall BTC-PERP events</a:t>
-            </a:r>
-          </a:p>
-          <a:p>
-            <a:pPr>
-              <a:spcAft>
-                <a:spcPts val="1000"/>
-              </a:spcAft>
-            </a:pPr>
-            <a:r>
-              <a:rPr sz="1900" b="0" i="0">
-                <a:solidFill>
-                  <a:srgbClr val="1A1A1A"/>
-                </a:solidFill>
-                <a:latin typeface="Arial"/>
-              </a:rPr>
-              <a:t>•  Emit a CSV of mid-price, spread, and depth</a:t>
-            </a:r>
-          </a:p>
-          <a:p>
-            <a:pPr>
-              <a:spcAft>
-                <a:spcPts val="1000"/>
-              </a:spcAft>
-            </a:pPr>
-            <a:r>
-              <a:rPr sz="1900" b="0" i="0">
-                <a:solidFill>
-                  <a:srgbClr val="1A1A1A"/>
-                </a:solidFill>
-                <a:latin typeface="Arial"/>
-              </a:rPr>
-              <a:t>•  Watch out: delete price levels that empty after a cancel</a:t>
-            </a:r>
-          </a:p>
-        </p:txBody>
-      </p:sp>
+        </p:spPr>
+      </p:pic>
     </p:spTree>
   </p:cSld>
   <p:clrMapOvr>
@@ -4165,19 +4002,30 @@
           <a:noFill/>
         </p:spPr>
         <p:txBody>
-          <a:bodyPr wrap="none">
+          <a:bodyPr wrap="square">
             <a:spAutoFit/>
           </a:bodyPr>
           <a:lstStyle/>
           <a:p>
             <a:r>
-              <a:rPr sz="2600" b="1" i="0">
+              <a:rPr sz="2400" b="1" i="0">
                 <a:solidFill>
                   <a:srgbClr val="990000"/>
                 </a:solidFill>
                 <a:latin typeface="Arial"/>
               </a:rPr>
-              <a:t>Reading &amp; Problem Set 2 (Python)</a:t>
+              <a:t>Getting the Data from Coincall</a:t>
+            </a:r>
+          </a:p>
+          <a:p>
+            <a:r>
+              <a:rPr sz="1300" b="0" i="1">
+                <a:solidFill>
+                  <a:srgbClr val="6D6D6D"/>
+                </a:solidFill>
+                <a:latin typeface="Arial"/>
+              </a:rPr>
+              <a:t>Cross-check exact paths at https://docs.coincall.com/</a:t>
             </a:r>
           </a:p>
         </p:txBody>
@@ -4190,8 +4038,8 @@
         </p:nvSpPr>
         <p:spPr>
           <a:xfrm>
-            <a:off x="457200" y="1234440"/>
-            <a:ext cx="11247120" cy="31750"/>
+            <a:off x="457200" y="1371600"/>
+            <a:ext cx="11247120" cy="27940"/>
           </a:xfrm>
           <a:prstGeom prst="rect">
             <a:avLst/>
@@ -4233,7 +4081,7 @@
         </p:nvSpPr>
         <p:spPr>
           <a:xfrm>
-            <a:off x="640080" y="1554480"/>
+            <a:off x="640080" y="1600200"/>
             <a:ext cx="10972800" cy="4937760"/>
           </a:xfrm>
           <a:prstGeom prst="rect">
@@ -4249,33 +4097,621 @@
           <a:p>
             <a:pPr>
               <a:spcAft>
-                <a:spcPts val="1000"/>
+                <a:spcPts val="500"/>
               </a:spcAft>
             </a:pPr>
             <a:r>
-              <a:rPr sz="1900" b="0" i="0">
+              <a:rPr sz="1200" b="0" i="0">
                 <a:solidFill>
                   <a:srgbClr val="1A1A1A"/>
                 </a:solidFill>
                 <a:latin typeface="Arial"/>
               </a:rPr>
-              <a:t>•  Cartea-Jaikumar-Penalva Ch. 1-3; Roll (1984); Glosten-Milgrom (1985)</a:t>
+              <a:t>•  Goal: pull a single option's order book and recent trades, build mid/spread.</a:t>
             </a:r>
           </a:p>
           <a:p>
             <a:pPr>
               <a:spcAft>
-                <a:spcPts val="1000"/>
+                <a:spcPts val="500"/>
               </a:spcAft>
             </a:pPr>
             <a:r>
-              <a:rPr sz="1900" b="0" i="0">
+              <a:rPr sz="1200" b="0" i="0">
                 <a:solidFill>
                   <a:srgbClr val="1A1A1A"/>
                 </a:solidFill>
                 <a:latin typeface="Arial"/>
               </a:rPr>
-              <a:t>•  PS2: order book, Roll estimator, Glosten-Milgrom, toxicity</a:t>
+              <a:t>•  Option order book (100 depth):  GET /open/option/order/orderbook/v1/{symbol}</a:t>
+            </a:r>
+          </a:p>
+          <a:p>
+            <a:pPr>
+              <a:spcAft>
+                <a:spcPts val="500"/>
+              </a:spcAft>
+            </a:pPr>
+            <a:r>
+              <a:rPr sz="1200" b="0" i="0">
+                <a:solidFill>
+                  <a:srgbClr val="1A1A1A"/>
+                </a:solidFill>
+                <a:latin typeface="Arial"/>
+              </a:rPr>
+              <a:t>•  Recent trades:                   GET /open/option/trade/lasttrade/v1/{symbol}</a:t>
+            </a:r>
+          </a:p>
+          <a:p>
+            <a:pPr>
+              <a:spcAft>
+                <a:spcPts val="500"/>
+              </a:spcAft>
+            </a:pPr>
+            <a:r>
+              <a:rPr sz="1200" b="0" i="0">
+                <a:solidFill>
+                  <a:srgbClr val="1A1A1A"/>
+                </a:solidFill>
+                <a:latin typeface="Arial"/>
+              </a:rPr>
+              <a:t>•  List symbols first:              GET /open/option/getInstruments/BTC</a:t>
+            </a:r>
+          </a:p>
+          <a:p>
+            <a:pPr>
+              <a:spcAft>
+                <a:spcPts val="500"/>
+              </a:spcAft>
+            </a:pPr>
+            <a:r>
+              <a:rPr sz="1200" b="0" i="0">
+                <a:solidFill>
+                  <a:srgbClr val="1A1A1A"/>
+                </a:solidFill>
+                <a:latin typeface="Arial"/>
+              </a:rPr>
+              <a:t>•  Response gives arrays of [price, size] for bids and asks -&gt; aggregate (L2)</a:t>
+            </a:r>
+          </a:p>
+          <a:p>
+            <a:pPr>
+              <a:spcAft>
+                <a:spcPts val="500"/>
+              </a:spcAft>
+            </a:pPr>
+            <a:r>
+              <a:rPr sz="1200" b="0" i="0">
+                <a:solidFill>
+                  <a:srgbClr val="1A1A1A"/>
+                </a:solidFill>
+                <a:latin typeface="Arial"/>
+              </a:rPr>
+              <a:t>•  For replay/backtests use the provided Parquet L2 snapshots (1s for options)</a:t>
+            </a:r>
+          </a:p>
+          <a:p>
+            <a:pPr>
+              <a:spcAft>
+                <a:spcPts val="500"/>
+              </a:spcAft>
+            </a:pPr>
+            <a:r>
+              <a:rPr sz="1200" b="0" i="0">
+                <a:solidFill>
+                  <a:srgbClr val="1A1A1A"/>
+                </a:solidFill>
+                <a:latin typeface="Arial"/>
+              </a:rPr>
+              <a:t>•  Live updates: subscribe to the /options/orderbook WebSocket channel</a:t>
+            </a:r>
+          </a:p>
+        </p:txBody>
+      </p:sp>
+    </p:spTree>
+  </p:cSld>
+  <p:clrMapOvr>
+    <a:masterClrMapping/>
+  </p:clrMapOvr>
+</p:sld>
+</file>
+
+<file path=ppt/slides/slide7.xml><?xml version="1.0" encoding="utf-8"?>
+<p:sld xmlns:a="http://schemas.openxmlformats.org/drawingml/2006/main" xmlns:p="http://schemas.openxmlformats.org/presentationml/2006/main" xmlns:r="http://schemas.openxmlformats.org/officeDocument/2006/relationships">
+  <p:cSld>
+    <p:spTree>
+      <p:nvGrpSpPr>
+        <p:cNvPr id="1" name=""/>
+        <p:cNvGrpSpPr/>
+        <p:nvPr/>
+      </p:nvGrpSpPr>
+      <p:grpSpPr/>
+      <p:sp>
+        <p:nvSpPr>
+          <p:cNvPr id="2" name="TextBox 1"/>
+          <p:cNvSpPr txBox="1"/>
+          <p:nvPr/>
+        </p:nvSpPr>
+        <p:spPr>
+          <a:xfrm>
+            <a:off x="457200" y="365760"/>
+            <a:ext cx="11247120" cy="640080"/>
+          </a:xfrm>
+          <a:prstGeom prst="rect">
+            <a:avLst/>
+          </a:prstGeom>
+          <a:noFill/>
+        </p:spPr>
+        <p:txBody>
+          <a:bodyPr wrap="none">
+            <a:spAutoFit/>
+          </a:bodyPr>
+          <a:lstStyle/>
+          <a:p>
+            <a:r>
+              <a:rPr sz="1800" b="1" i="0">
+                <a:solidFill>
+                  <a:srgbClr val="990000"/>
+                </a:solidFill>
+                <a:latin typeface="Arial"/>
+              </a:rPr>
+              <a:t>Code — week2_orderbook.py -- mid &amp; spread from a Coincall L2 book</a:t>
+            </a:r>
+          </a:p>
+        </p:txBody>
+      </p:sp>
+      <p:sp>
+        <p:nvSpPr>
+          <p:cNvPr id="3" name="Rectangle 2"/>
+          <p:cNvSpPr/>
+          <p:nvPr/>
+        </p:nvSpPr>
+        <p:spPr>
+          <a:xfrm>
+            <a:off x="457200" y="1097280"/>
+            <a:ext cx="11247120" cy="5394960"/>
+          </a:xfrm>
+          <a:prstGeom prst="rect">
+            <a:avLst/>
+          </a:prstGeom>
+          <a:solidFill>
+            <a:srgbClr val="F5F5F5"/>
+          </a:solidFill>
+          <a:ln w="9525">
+            <a:solidFill>
+              <a:srgbClr val="6D6D6D"/>
+            </a:solidFill>
+          </a:ln>
+        </p:spPr>
+        <p:style>
+          <a:lnRef idx="1">
+            <a:schemeClr val="accent1"/>
+          </a:lnRef>
+          <a:fillRef idx="3">
+            <a:schemeClr val="accent1"/>
+          </a:fillRef>
+          <a:effectRef idx="2">
+            <a:schemeClr val="accent1"/>
+          </a:effectRef>
+          <a:fontRef idx="minor">
+            <a:schemeClr val="lt1"/>
+          </a:fontRef>
+        </p:style>
+        <p:txBody>
+          <a:bodyPr rtlCol="0" anchor="ctr" wrap="square" lIns="182880" tIns="91440"/>
+          <a:lstStyle/>
+          <a:p>
+            <a:pPr algn="ctr">
+              <a:spcAft>
+                <a:spcPts val="0"/>
+              </a:spcAft>
+            </a:pPr>
+            <a:r>
+              <a:rPr sz="1100" b="0" i="0">
+                <a:solidFill>
+                  <a:srgbClr val="1A1A1A"/>
+                </a:solidFill>
+                <a:latin typeface="Consolas"/>
+              </a:rPr>
+              <a:t>from coincall_client import signed_get   # from Week 1</a:t>
+            </a:r>
+          </a:p>
+          <a:p>
+            <a:pPr>
+              <a:spcAft>
+                <a:spcPts val="0"/>
+              </a:spcAft>
+            </a:pPr>
+            <a:r>
+              <a:rPr sz="1100" b="0" i="0">
+                <a:solidFill>
+                  <a:srgbClr val="1A1A1A"/>
+                </a:solidFill>
+                <a:latin typeface="Consolas"/>
+              </a:rPr>
+              <a:t> </a:t>
+            </a:r>
+          </a:p>
+          <a:p>
+            <a:pPr>
+              <a:spcAft>
+                <a:spcPts val="0"/>
+              </a:spcAft>
+            </a:pPr>
+            <a:r>
+              <a:rPr sz="1100" b="0" i="0">
+                <a:solidFill>
+                  <a:srgbClr val="1A1A1A"/>
+                </a:solidFill>
+                <a:latin typeface="Consolas"/>
+              </a:rPr>
+              <a:t>def l2_top_of_book(symbol, key, secret):</a:t>
+            </a:r>
+          </a:p>
+          <a:p>
+            <a:pPr>
+              <a:spcAft>
+                <a:spcPts val="0"/>
+              </a:spcAft>
+            </a:pPr>
+            <a:r>
+              <a:rPr sz="1100" b="0" i="0">
+                <a:solidFill>
+                  <a:srgbClr val="1A1A1A"/>
+                </a:solidFill>
+                <a:latin typeface="Consolas"/>
+              </a:rPr>
+              <a:t>    ob = signed_get(f"/open/option/order/orderbook/v1/{symbol}", {}, key, secret)</a:t>
+            </a:r>
+          </a:p>
+          <a:p>
+            <a:pPr>
+              <a:spcAft>
+                <a:spcPts val="0"/>
+              </a:spcAft>
+            </a:pPr>
+            <a:r>
+              <a:rPr sz="1100" b="0" i="0">
+                <a:solidFill>
+                  <a:srgbClr val="1A1A1A"/>
+                </a:solidFill>
+                <a:latin typeface="Consolas"/>
+              </a:rPr>
+              <a:t>    data = ob["data"]                       # confirm field names in the docs</a:t>
+            </a:r>
+          </a:p>
+          <a:p>
+            <a:pPr>
+              <a:spcAft>
+                <a:spcPts val="0"/>
+              </a:spcAft>
+            </a:pPr>
+            <a:r>
+              <a:rPr sz="1100" b="0" i="0">
+                <a:solidFill>
+                  <a:srgbClr val="1A1A1A"/>
+                </a:solidFill>
+                <a:latin typeface="Consolas"/>
+              </a:rPr>
+              <a:t>    bids = sorted(data["bids"], key=lambda x: -float(x[0]))</a:t>
+            </a:r>
+          </a:p>
+          <a:p>
+            <a:pPr>
+              <a:spcAft>
+                <a:spcPts val="0"/>
+              </a:spcAft>
+            </a:pPr>
+            <a:r>
+              <a:rPr sz="1100" b="0" i="0">
+                <a:solidFill>
+                  <a:srgbClr val="1A1A1A"/>
+                </a:solidFill>
+                <a:latin typeface="Consolas"/>
+              </a:rPr>
+              <a:t>    asks = sorted(data["asks"], key=lambda x:  float(x[0]))</a:t>
+            </a:r>
+          </a:p>
+          <a:p>
+            <a:pPr>
+              <a:spcAft>
+                <a:spcPts val="0"/>
+              </a:spcAft>
+            </a:pPr>
+            <a:r>
+              <a:rPr sz="1100" b="0" i="0">
+                <a:solidFill>
+                  <a:srgbClr val="1A1A1A"/>
+                </a:solidFill>
+                <a:latin typeface="Consolas"/>
+              </a:rPr>
+              <a:t>    best_bid, best_ask = float(bids[0][0]), float(asks[0][0])</a:t>
+            </a:r>
+          </a:p>
+          <a:p>
+            <a:pPr>
+              <a:spcAft>
+                <a:spcPts val="0"/>
+              </a:spcAft>
+            </a:pPr>
+            <a:r>
+              <a:rPr sz="1100" b="0" i="0">
+                <a:solidFill>
+                  <a:srgbClr val="1A1A1A"/>
+                </a:solidFill>
+                <a:latin typeface="Consolas"/>
+              </a:rPr>
+              <a:t>    mid    = 0.5 * (best_bid + best_ask)</a:t>
+            </a:r>
+          </a:p>
+          <a:p>
+            <a:pPr>
+              <a:spcAft>
+                <a:spcPts val="0"/>
+              </a:spcAft>
+            </a:pPr>
+            <a:r>
+              <a:rPr sz="1100" b="0" i="0">
+                <a:solidFill>
+                  <a:srgbClr val="1A1A1A"/>
+                </a:solidFill>
+                <a:latin typeface="Consolas"/>
+              </a:rPr>
+              <a:t>    spread = best_ask - best_bid</a:t>
+            </a:r>
+          </a:p>
+          <a:p>
+            <a:pPr>
+              <a:spcAft>
+                <a:spcPts val="0"/>
+              </a:spcAft>
+            </a:pPr>
+            <a:r>
+              <a:rPr sz="1100" b="0" i="0">
+                <a:solidFill>
+                  <a:srgbClr val="1A1A1A"/>
+                </a:solidFill>
+                <a:latin typeface="Consolas"/>
+              </a:rPr>
+              <a:t>    return mid, spread, best_bid, best_ask</a:t>
+            </a:r>
+          </a:p>
+          <a:p>
+            <a:pPr>
+              <a:spcAft>
+                <a:spcPts val="0"/>
+              </a:spcAft>
+            </a:pPr>
+            <a:r>
+              <a:rPr sz="1100" b="0" i="0">
+                <a:solidFill>
+                  <a:srgbClr val="1A1A1A"/>
+                </a:solidFill>
+                <a:latin typeface="Consolas"/>
+              </a:rPr>
+              <a:t> </a:t>
+            </a:r>
+          </a:p>
+          <a:p>
+            <a:pPr>
+              <a:spcAft>
+                <a:spcPts val="0"/>
+              </a:spcAft>
+            </a:pPr>
+            <a:r>
+              <a:rPr sz="1100" b="0" i="0">
+                <a:solidFill>
+                  <a:srgbClr val="1A1A1A"/>
+                </a:solidFill>
+                <a:latin typeface="Consolas"/>
+              </a:rPr>
+              <a:t># For an offline backtest, replay the provided Parquet instead:</a:t>
+            </a:r>
+          </a:p>
+          <a:p>
+            <a:pPr>
+              <a:spcAft>
+                <a:spcPts val="0"/>
+              </a:spcAft>
+            </a:pPr>
+            <a:r>
+              <a:rPr sz="1100" b="0" i="0">
+                <a:solidFill>
+                  <a:srgbClr val="1A1A1A"/>
+                </a:solidFill>
+                <a:latin typeface="Consolas"/>
+              </a:rPr>
+              <a:t>#   import pandas as pd</a:t>
+            </a:r>
+          </a:p>
+          <a:p>
+            <a:pPr>
+              <a:spcAft>
+                <a:spcPts val="0"/>
+              </a:spcAft>
+            </a:pPr>
+            <a:r>
+              <a:rPr sz="1100" b="0" i="0">
+                <a:solidFill>
+                  <a:srgbClr val="1A1A1A"/>
+                </a:solidFill>
+                <a:latin typeface="Consolas"/>
+              </a:rPr>
+              <a:t>#   book = pd.read_parquet("coincall_btc_options_l2_2025Q4.parquet")</a:t>
+            </a:r>
+          </a:p>
+          <a:p>
+            <a:pPr>
+              <a:spcAft>
+                <a:spcPts val="0"/>
+              </a:spcAft>
+            </a:pPr>
+            <a:r>
+              <a:rPr sz="1100" b="0" i="0">
+                <a:solidFill>
+                  <a:srgbClr val="1A1A1A"/>
+                </a:solidFill>
+                <a:latin typeface="Consolas"/>
+              </a:rPr>
+              <a:t>#   book["mid"] = 0.5 * (book.bid_px_0 + book.ask_px_0)</a:t>
+            </a:r>
+          </a:p>
+        </p:txBody>
+      </p:sp>
+    </p:spTree>
+  </p:cSld>
+  <p:clrMapOvr>
+    <a:masterClrMapping/>
+  </p:clrMapOvr>
+</p:sld>
+</file>
+
+<file path=ppt/slides/slide8.xml><?xml version="1.0" encoding="utf-8"?>
+<p:sld xmlns:a="http://schemas.openxmlformats.org/drawingml/2006/main" xmlns:p="http://schemas.openxmlformats.org/presentationml/2006/main" xmlns:r="http://schemas.openxmlformats.org/officeDocument/2006/relationships">
+  <p:cSld>
+    <p:spTree>
+      <p:nvGrpSpPr>
+        <p:cNvPr id="1" name=""/>
+        <p:cNvGrpSpPr/>
+        <p:nvPr/>
+      </p:nvGrpSpPr>
+      <p:grpSpPr/>
+      <p:pic>
+        <p:nvPicPr>
+          <p:cNvPr id="2" name="Picture 1" descr="ncsu_logo.png"/>
+          <p:cNvPicPr>
+            <a:picLocks noChangeAspect="1"/>
+          </p:cNvPicPr>
+          <p:nvPr/>
+        </p:nvPicPr>
+        <p:blipFill>
+          <a:blip r:embed="rId2"/>
+          <a:stretch>
+            <a:fillRect/>
+          </a:stretch>
+        </p:blipFill>
+        <p:spPr>
+          <a:xfrm>
+            <a:off x="9784080" y="274320"/>
+            <a:ext cx="2011680" cy="316653"/>
+          </a:xfrm>
+          <a:prstGeom prst="rect">
+            <a:avLst/>
+          </a:prstGeom>
+        </p:spPr>
+      </p:pic>
+      <p:sp>
+        <p:nvSpPr>
+          <p:cNvPr id="3" name="TextBox 2"/>
+          <p:cNvSpPr txBox="1"/>
+          <p:nvPr/>
+        </p:nvSpPr>
+        <p:spPr>
+          <a:xfrm>
+            <a:off x="457200" y="457200"/>
+            <a:ext cx="8961120" cy="822960"/>
+          </a:xfrm>
+          <a:prstGeom prst="rect">
+            <a:avLst/>
+          </a:prstGeom>
+          <a:noFill/>
+        </p:spPr>
+        <p:txBody>
+          <a:bodyPr wrap="square">
+            <a:spAutoFit/>
+          </a:bodyPr>
+          <a:lstStyle/>
+          <a:p>
+            <a:r>
+              <a:rPr sz="2400" b="1" i="0">
+                <a:solidFill>
+                  <a:srgbClr val="990000"/>
+                </a:solidFill>
+                <a:latin typeface="Arial"/>
+              </a:rPr>
+              <a:t>Reading</a:t>
+            </a:r>
+          </a:p>
+        </p:txBody>
+      </p:sp>
+      <p:sp>
+        <p:nvSpPr>
+          <p:cNvPr id="4" name="Rectangle 3"/>
+          <p:cNvSpPr/>
+          <p:nvPr/>
+        </p:nvSpPr>
+        <p:spPr>
+          <a:xfrm>
+            <a:off x="457200" y="1371600"/>
+            <a:ext cx="11247120" cy="27940"/>
+          </a:xfrm>
+          <a:prstGeom prst="rect">
+            <a:avLst/>
+          </a:prstGeom>
+          <a:solidFill>
+            <a:srgbClr val="CC0000"/>
+          </a:solidFill>
+          <a:ln>
+            <a:noFill/>
+          </a:ln>
+        </p:spPr>
+        <p:style>
+          <a:lnRef idx="1">
+            <a:schemeClr val="accent1"/>
+          </a:lnRef>
+          <a:fillRef idx="3">
+            <a:schemeClr val="accent1"/>
+          </a:fillRef>
+          <a:effectRef idx="2">
+            <a:schemeClr val="accent1"/>
+          </a:effectRef>
+          <a:fontRef idx="minor">
+            <a:schemeClr val="lt1"/>
+          </a:fontRef>
+        </p:style>
+        <p:txBody>
+          <a:bodyPr rtlCol="0" anchor="ctr"/>
+          <a:lstStyle/>
+          <a:p>
+            <a:pPr algn="ctr"/>
+          </a:p>
+        </p:txBody>
+      </p:sp>
+      <p:sp>
+        <p:nvSpPr>
+          <p:cNvPr id="5" name="TextBox 4"/>
+          <p:cNvSpPr txBox="1"/>
+          <p:nvPr/>
+        </p:nvSpPr>
+        <p:spPr>
+          <a:xfrm>
+            <a:off x="640080" y="1600200"/>
+            <a:ext cx="10972800" cy="4937760"/>
+          </a:xfrm>
+          <a:prstGeom prst="rect">
+            <a:avLst/>
+          </a:prstGeom>
+          <a:noFill/>
+        </p:spPr>
+        <p:txBody>
+          <a:bodyPr wrap="square">
+            <a:spAutoFit/>
+          </a:bodyPr>
+          <a:lstStyle/>
+          <a:p>
+            <a:pPr>
+              <a:spcAft>
+                <a:spcPts val="800"/>
+              </a:spcAft>
+            </a:pPr>
+            <a:r>
+              <a:rPr sz="1700" b="0" i="0">
+                <a:solidFill>
+                  <a:srgbClr val="1A1A1A"/>
+                </a:solidFill>
+                <a:latin typeface="Arial"/>
+              </a:rPr>
+              <a:t>•  Cartea-Jaikumar-Penalva, Ch. 1-3; Roll (1984); Glosten-Milgrom (1985)</a:t>
             </a:r>
           </a:p>
         </p:txBody>
